--- a/Calibrating a Function Generator/Lab 3.pptx
+++ b/Calibrating a Function Generator/Lab 3.pptx
@@ -7949,688 +7949,69 @@
           </a:p>
         </p:txBody>
       </p:sp>
-      <mc:AlternateContent xmlns:mc="http://schemas.openxmlformats.org/markup-compatibility/2006">
-        <mc:Choice xmlns:a14="http://schemas.microsoft.com/office/drawing/2010/main" Requires="a14">
-          <p:sp>
-            <p:nvSpPr>
-              <p:cNvPr id="4" name="Text Placeholder 3">
-                <a:extLst>
-                  <a:ext uri="{FF2B5EF4-FFF2-40B4-BE49-F238E27FC236}">
-                    <a16:creationId xmlns:a16="http://schemas.microsoft.com/office/drawing/2014/main" id="{A90712EA-21C2-2BCA-A6D9-469AD535DD46}"/>
-                  </a:ext>
-                </a:extLst>
-              </p:cNvPr>
-              <p:cNvSpPr>
-                <a:spLocks noGrp="1"/>
-              </p:cNvSpPr>
-              <p:nvPr>
-                <p:ph type="body" sz="half" idx="2"/>
-              </p:nvPr>
-            </p:nvSpPr>
-            <p:spPr/>
-            <p:txBody>
-              <a:bodyPr>
-                <a:normAutofit/>
-              </a:bodyPr>
-              <a:lstStyle/>
-              <a:p>
-                <a:pPr algn="l"/>
-                <a:r>
-                  <a:rPr lang="en-US" cap="none" dirty="0"/>
-                  <a:t>Uncertainty </a:t>
-                </a:r>
-                <a14:m>
-                  <m:oMath xmlns:m="http://schemas.openxmlformats.org/officeDocument/2006/math">
-                    <m:sSub>
-                      <m:sSubPr>
-                        <m:ctrlPr>
-                          <a:rPr lang="en-US" i="1" cap="none">
-                            <a:latin typeface="Cambria Math" panose="02040503050406030204" pitchFamily="18" charset="0"/>
-                          </a:rPr>
-                        </m:ctrlPr>
-                      </m:sSubPr>
-                      <m:e>
-                        <m:r>
-                          <a:rPr lang="en-US" i="1" cap="none">
-                            <a:latin typeface="Cambria Math" panose="02040503050406030204" pitchFamily="18" charset="0"/>
-                          </a:rPr>
-                          <m:t>𝑠</m:t>
-                        </m:r>
-                      </m:e>
-                      <m:sub>
-                        <m:r>
-                          <a:rPr lang="en-US" i="1" cap="none">
-                            <a:latin typeface="Cambria Math" panose="02040503050406030204" pitchFamily="18" charset="0"/>
-                          </a:rPr>
-                          <m:t>𝑧</m:t>
-                        </m:r>
-                      </m:sub>
-                    </m:sSub>
-                  </m:oMath>
-                </a14:m>
-                <a:r>
-                  <a:rPr lang="en-US" cap="none" dirty="0"/>
-                  <a:t>: for a fast fourier transform, the uncertainty is equal to the frequency resolution (the width of one bin).</a:t>
-                </a:r>
-              </a:p>
-              <a:p>
-                <a:pPr marL="285750" indent="-285750" algn="l">
-                  <a:buFont typeface="Arial" panose="020B0604020202020204" pitchFamily="34" charset="0"/>
-                  <a:buChar char="•"/>
-                </a:pPr>
-                <a:r>
-                  <a:rPr lang="en-US" cap="none" dirty="0"/>
-                  <a:t>Oscilloscope </a:t>
-                </a:r>
-                <a14:m>
-                  <m:oMath xmlns:m="http://schemas.openxmlformats.org/officeDocument/2006/math">
-                    <m:r>
-                      <m:rPr>
-                        <m:sty m:val="p"/>
-                      </m:rPr>
-                      <a:rPr lang="en-US" i="1" cap="none" dirty="0" smtClean="0">
-                        <a:latin typeface="Cambria Math" panose="02040503050406030204" pitchFamily="18" charset="0"/>
-                      </a:rPr>
-                      <m:t>Δ</m:t>
-                    </m:r>
-                    <m:r>
-                      <a:rPr lang="en-US" i="1" cap="none">
-                        <a:latin typeface="Cambria Math" panose="02040503050406030204" pitchFamily="18" charset="0"/>
-                      </a:rPr>
-                      <m:t>𝑓</m:t>
-                    </m:r>
-                  </m:oMath>
-                </a14:m>
-                <a:r>
-                  <a:rPr lang="en-US" cap="none" dirty="0"/>
-                  <a:t>: 12.33 hz (at 1 khz) and 49.32 hz (at 5 </a:t>
-                </a:r>
-                <a:r>
-                  <a:rPr lang="en-US" cap="none" dirty="0" err="1"/>
-                  <a:t>khz</a:t>
-                </a:r>
-                <a:r>
-                  <a:rPr lang="en-US" cap="none" dirty="0"/>
-                  <a:t>). </a:t>
-                </a:r>
-              </a:p>
-              <a:p>
-                <a:pPr marL="285750" indent="-285750" algn="l">
-                  <a:buFont typeface="Arial" panose="020B0604020202020204" pitchFamily="34" charset="0"/>
-                  <a:buChar char="•"/>
-                </a:pPr>
-                <a:r>
-                  <a:rPr lang="en-US" cap="none" dirty="0"/>
-                  <a:t>Python </a:t>
-                </a:r>
-                <a14:m>
-                  <m:oMath xmlns:m="http://schemas.openxmlformats.org/officeDocument/2006/math">
-                    <m:r>
-                      <m:rPr>
-                        <m:sty m:val="p"/>
-                      </m:rPr>
-                      <a:rPr lang="en-US" cap="none">
-                        <a:latin typeface="Cambria Math" panose="02040503050406030204" pitchFamily="18" charset="0"/>
-                      </a:rPr>
-                      <m:t>Δ</m:t>
-                    </m:r>
-                    <m:r>
-                      <a:rPr lang="en-US" i="1" cap="none">
-                        <a:latin typeface="Cambria Math" panose="02040503050406030204" pitchFamily="18" charset="0"/>
-                      </a:rPr>
-                      <m:t>𝑓</m:t>
-                    </m:r>
-                  </m:oMath>
-                </a14:m>
-                <a:r>
-                  <a:rPr lang="en-US" cap="none" dirty="0"/>
-                  <a:t>: defined by </a:t>
-                </a:r>
-                <a14:m>
-                  <m:oMath xmlns:m="http://schemas.openxmlformats.org/officeDocument/2006/math">
-                    <m:sSub>
-                      <m:sSubPr>
-                        <m:ctrlPr>
-                          <a:rPr lang="en-US" i="1" cap="none">
-                            <a:latin typeface="Cambria Math" panose="02040503050406030204" pitchFamily="18" charset="0"/>
-                          </a:rPr>
-                        </m:ctrlPr>
-                      </m:sSubPr>
-                      <m:e>
-                        <m:r>
-                          <a:rPr lang="en-US" i="1" cap="none">
-                            <a:latin typeface="Cambria Math" panose="02040503050406030204" pitchFamily="18" charset="0"/>
-                          </a:rPr>
-                          <m:t>𝑓</m:t>
-                        </m:r>
-                      </m:e>
-                      <m:sub>
-                        <m:r>
-                          <a:rPr lang="en-US" i="1" cap="none">
-                            <a:latin typeface="Cambria Math" panose="02040503050406030204" pitchFamily="18" charset="0"/>
-                          </a:rPr>
-                          <m:t>𝑠</m:t>
-                        </m:r>
-                      </m:sub>
-                    </m:sSub>
-                    <m:r>
-                      <m:rPr>
-                        <m:lit/>
-                      </m:rPr>
-                      <a:rPr lang="en-US" i="1" cap="none">
-                        <a:latin typeface="Cambria Math" panose="02040503050406030204" pitchFamily="18" charset="0"/>
-                      </a:rPr>
-                      <m:t>/</m:t>
-                    </m:r>
-                    <m:r>
-                      <a:rPr lang="en-US" i="1" cap="none" smtClean="0">
-                        <a:latin typeface="Cambria Math" panose="02040503050406030204" pitchFamily="18" charset="0"/>
-                      </a:rPr>
-                      <m:t>𝑁</m:t>
-                    </m:r>
-                  </m:oMath>
-                </a14:m>
-                <a:endParaRPr lang="en-US" cap="none" dirty="0"/>
-              </a:p>
-              <a:p>
-                <a:pPr marL="285750" indent="-285750" algn="l">
-                  <a:buFont typeface="Arial" panose="020B0604020202020204" pitchFamily="34" charset="0"/>
-                  <a:buChar char="•"/>
-                </a:pPr>
-                <a:r>
-                  <a:rPr lang="en-US" cap="none" dirty="0"/>
-                  <a:t>Where </a:t>
-                </a:r>
-                <a14:m>
-                  <m:oMath xmlns:m="http://schemas.openxmlformats.org/officeDocument/2006/math">
-                    <m:sSub>
-                      <m:sSubPr>
-                        <m:ctrlPr>
-                          <a:rPr lang="en-US" i="1" cap="none">
-                            <a:latin typeface="Cambria Math" panose="02040503050406030204" pitchFamily="18" charset="0"/>
-                          </a:rPr>
-                        </m:ctrlPr>
-                      </m:sSubPr>
-                      <m:e>
-                        <m:r>
-                          <a:rPr lang="en-US" i="1" cap="none">
-                            <a:latin typeface="Cambria Math" panose="02040503050406030204" pitchFamily="18" charset="0"/>
-                          </a:rPr>
-                          <m:t>𝑓</m:t>
-                        </m:r>
-                      </m:e>
-                      <m:sub>
-                        <m:r>
-                          <a:rPr lang="en-US" i="1" cap="none">
-                            <a:latin typeface="Cambria Math" panose="02040503050406030204" pitchFamily="18" charset="0"/>
-                          </a:rPr>
-                          <m:t>𝑠</m:t>
-                        </m:r>
-                      </m:sub>
-                    </m:sSub>
-                  </m:oMath>
-                </a14:m>
-                <a:r>
-                  <a:rPr lang="en-US" cap="none" dirty="0"/>
-                  <a:t> is the sample rate and </a:t>
-                </a:r>
-                <a14:m>
-                  <m:oMath xmlns:m="http://schemas.openxmlformats.org/officeDocument/2006/math">
-                    <m:r>
-                      <a:rPr lang="en-US" i="1" cap="none">
-                        <a:latin typeface="Cambria Math" panose="02040503050406030204" pitchFamily="18" charset="0"/>
-                      </a:rPr>
-                      <m:t>𝑁</m:t>
-                    </m:r>
-                  </m:oMath>
-                </a14:m>
-                <a:r>
-                  <a:rPr lang="en-US" cap="none" dirty="0"/>
-                  <a:t> is the number of samples</a:t>
-                </a:r>
-              </a:p>
-            </p:txBody>
-          </p:sp>
-        </mc:Choice>
-        <mc:Fallback>
-          <p:sp>
-            <p:nvSpPr>
-              <p:cNvPr id="4" name="Text Placeholder 3">
-                <a:extLst>
-                  <a:ext uri="{FF2B5EF4-FFF2-40B4-BE49-F238E27FC236}">
-                    <a16:creationId xmlns:a16="http://schemas.microsoft.com/office/drawing/2014/main" id="{A90712EA-21C2-2BCA-A6D9-469AD535DD46}"/>
-                  </a:ext>
-                </a:extLst>
-              </p:cNvPr>
-              <p:cNvSpPr>
-                <a:spLocks noGrp="1" noRot="1" noChangeAspect="1" noMove="1" noResize="1" noEditPoints="1" noAdjustHandles="1" noChangeArrowheads="1" noChangeShapeType="1" noTextEdit="1"/>
-              </p:cNvSpPr>
-              <p:nvPr>
-                <p:ph type="body" sz="half" idx="2"/>
-              </p:nvPr>
-            </p:nvSpPr>
-            <p:spPr>
-              <a:blipFill>
-                <a:blip r:embed="rId2"/>
-                <a:stretch>
-                  <a:fillRect l="-965"/>
-                </a:stretch>
-              </a:blipFill>
-            </p:spPr>
-            <p:txBody>
-              <a:bodyPr/>
-              <a:lstStyle/>
-              <a:p>
-                <a:r>
-                  <a:rPr lang="en-US">
-                    <a:noFill/>
-                  </a:rPr>
-                  <a:t> </a:t>
-                </a:r>
-              </a:p>
-            </p:txBody>
-          </p:sp>
-        </mc:Fallback>
-      </mc:AlternateContent>
-      <mc:AlternateContent xmlns:mc="http://schemas.openxmlformats.org/markup-compatibility/2006">
-        <mc:Choice xmlns:a14="http://schemas.microsoft.com/office/drawing/2010/main" Requires="a14">
-          <p:sp>
-            <p:nvSpPr>
-              <p:cNvPr id="7" name="Content Placeholder 6">
-                <a:extLst>
-                  <a:ext uri="{FF2B5EF4-FFF2-40B4-BE49-F238E27FC236}">
-                    <a16:creationId xmlns:a16="http://schemas.microsoft.com/office/drawing/2014/main" id="{2A738C74-3616-8B95-B98F-9F23CA6CFE36}"/>
-                  </a:ext>
-                </a:extLst>
-              </p:cNvPr>
-              <p:cNvSpPr>
-                <a:spLocks noGrp="1"/>
-              </p:cNvSpPr>
-              <p:nvPr>
-                <p:ph sz="quarter" idx="13"/>
-              </p:nvPr>
-            </p:nvSpPr>
-            <p:spPr/>
-            <p:txBody>
-              <a:bodyPr/>
-              <a:lstStyle/>
-              <a:p>
-                <a:r>
-                  <a:rPr lang="en-US" cap="none" dirty="0"/>
-                  <a:t>Statistical Significance: </a:t>
-                </a:r>
-                <a14:m>
-                  <m:oMath xmlns:m="http://schemas.openxmlformats.org/officeDocument/2006/math">
-                    <m:r>
-                      <a:rPr lang="en-US" b="0" i="1" cap="none" smtClean="0">
-                        <a:latin typeface="Cambria Math" panose="02040503050406030204" pitchFamily="18" charset="0"/>
-                      </a:rPr>
-                      <m:t>𝑡</m:t>
-                    </m:r>
-                    <m:r>
-                      <a:rPr lang="en-US" b="0" i="1" cap="none" smtClean="0">
-                        <a:latin typeface="Cambria Math" panose="02040503050406030204" pitchFamily="18" charset="0"/>
-                      </a:rPr>
-                      <m:t>=</m:t>
-                    </m:r>
-                    <m:f>
-                      <m:fPr>
-                        <m:ctrlPr>
-                          <a:rPr lang="en-US" b="0" i="1" cap="none" smtClean="0">
-                            <a:latin typeface="Cambria Math" panose="02040503050406030204" pitchFamily="18" charset="0"/>
-                          </a:rPr>
-                        </m:ctrlPr>
-                      </m:fPr>
-                      <m:num>
-                        <m:r>
-                          <a:rPr lang="en-US" b="0" i="1" cap="none" smtClean="0">
-                            <a:latin typeface="Cambria Math" panose="02040503050406030204" pitchFamily="18" charset="0"/>
-                          </a:rPr>
-                          <m:t>|</m:t>
-                        </m:r>
-                        <m:r>
-                          <a:rPr lang="en-US" b="0" i="1" cap="none" smtClean="0">
-                            <a:latin typeface="Cambria Math" panose="02040503050406030204" pitchFamily="18" charset="0"/>
-                          </a:rPr>
-                          <m:t>𝜇</m:t>
-                        </m:r>
-                        <m:r>
-                          <a:rPr lang="en-US" b="0" i="1" cap="none" smtClean="0">
-                            <a:latin typeface="Cambria Math" panose="02040503050406030204" pitchFamily="18" charset="0"/>
-                          </a:rPr>
-                          <m:t>−</m:t>
-                        </m:r>
-                        <m:r>
-                          <a:rPr lang="en-US" b="0" i="1" cap="none" smtClean="0">
-                            <a:latin typeface="Cambria Math" panose="02040503050406030204" pitchFamily="18" charset="0"/>
-                          </a:rPr>
-                          <m:t>𝑧</m:t>
-                        </m:r>
-                        <m:r>
-                          <a:rPr lang="en-US" b="0" i="1" cap="none" smtClean="0">
-                            <a:latin typeface="Cambria Math" panose="02040503050406030204" pitchFamily="18" charset="0"/>
-                          </a:rPr>
-                          <m:t>|</m:t>
-                        </m:r>
-                      </m:num>
-                      <m:den>
-                        <m:sSub>
-                          <m:sSubPr>
-                            <m:ctrlPr>
-                              <a:rPr lang="en-US" b="0" i="1" cap="none" smtClean="0">
-                                <a:latin typeface="Cambria Math" panose="02040503050406030204" pitchFamily="18" charset="0"/>
-                              </a:rPr>
-                            </m:ctrlPr>
-                          </m:sSubPr>
-                          <m:e>
-                            <m:r>
-                              <a:rPr lang="en-US" b="0" i="1" cap="none" smtClean="0">
-                                <a:latin typeface="Cambria Math" panose="02040503050406030204" pitchFamily="18" charset="0"/>
-                              </a:rPr>
-                              <m:t>𝑠</m:t>
-                            </m:r>
-                          </m:e>
-                          <m:sub>
-                            <m:r>
-                              <a:rPr lang="en-US" b="0" i="1" cap="none" smtClean="0">
-                                <a:latin typeface="Cambria Math" panose="02040503050406030204" pitchFamily="18" charset="0"/>
-                              </a:rPr>
-                              <m:t>𝑧</m:t>
-                            </m:r>
-                          </m:sub>
-                        </m:sSub>
-                      </m:den>
-                    </m:f>
-                  </m:oMath>
-                </a14:m>
-                <a:endParaRPr lang="en-US" b="0" i="1" cap="none" dirty="0">
-                  <a:latin typeface="Cambria Math" panose="02040503050406030204" pitchFamily="18" charset="0"/>
-                </a:endParaRPr>
-              </a:p>
-              <a:p>
-                <a:pPr marL="457200" indent="-457200">
-                  <a:buFont typeface="+mj-lt"/>
-                  <a:buAutoNum type="arabicPeriod"/>
-                </a:pPr>
-                <a:r>
-                  <a:rPr lang="en-US" cap="none" dirty="0"/>
-                  <a:t>For a 1 kHz Signal </a:t>
-                </a:r>
-              </a:p>
-              <a:p>
-                <a:pPr marL="0" indent="0">
-                  <a:buNone/>
-                </a:pPr>
-                <a:r>
-                  <a:rPr lang="en-US" cap="none" dirty="0"/>
-                  <a:t> A. </a:t>
-                </a:r>
-                <a14:m>
-                  <m:oMath xmlns:m="http://schemas.openxmlformats.org/officeDocument/2006/math">
-                    <m:r>
-                      <a:rPr lang="en-US" b="0" i="1" cap="none" smtClean="0">
-                        <a:latin typeface="Cambria Math" panose="02040503050406030204" pitchFamily="18" charset="0"/>
-                      </a:rPr>
-                      <m:t>𝑡</m:t>
-                    </m:r>
-                  </m:oMath>
-                </a14:m>
-                <a:r>
-                  <a:rPr lang="en-US" cap="none" dirty="0"/>
-                  <a:t> value for the Oscilloscope's built in FFT is </a:t>
-                </a:r>
-              </a:p>
-              <a:p>
-                <a:pPr marL="0" indent="0" algn="ctr">
-                  <a:buNone/>
-                </a:pPr>
-                <a:r>
-                  <a:rPr lang="en-US" cap="none" dirty="0"/>
-                  <a:t> </a:t>
-                </a:r>
-                <a14:m>
-                  <m:oMath xmlns:m="http://schemas.openxmlformats.org/officeDocument/2006/math">
-                    <m:r>
-                      <a:rPr lang="en-US" i="1" cap="none">
-                        <a:latin typeface="Cambria Math" panose="02040503050406030204" pitchFamily="18" charset="0"/>
-                      </a:rPr>
-                      <m:t>𝑡</m:t>
-                    </m:r>
-                    <m:r>
-                      <a:rPr lang="en-US" i="1" cap="none">
-                        <a:latin typeface="Cambria Math" panose="02040503050406030204" pitchFamily="18" charset="0"/>
-                      </a:rPr>
-                      <m:t>=</m:t>
-                    </m:r>
-                    <m:f>
-                      <m:fPr>
-                        <m:ctrlPr>
-                          <a:rPr lang="en-US" i="1" cap="none">
-                            <a:latin typeface="Cambria Math" panose="02040503050406030204" pitchFamily="18" charset="0"/>
-                          </a:rPr>
-                        </m:ctrlPr>
-                      </m:fPr>
-                      <m:num>
-                        <m:r>
-                          <a:rPr lang="en-US" i="1" cap="none">
-                            <a:latin typeface="Cambria Math" panose="02040503050406030204" pitchFamily="18" charset="0"/>
-                          </a:rPr>
-                          <m:t>|</m:t>
-                        </m:r>
-                        <m:r>
-                          <a:rPr lang="en-US" i="1" cap="none">
-                            <a:latin typeface="Cambria Math" panose="02040503050406030204" pitchFamily="18" charset="0"/>
-                          </a:rPr>
-                          <m:t>1000</m:t>
-                        </m:r>
-                        <m:r>
-                          <a:rPr lang="en-US" i="1" cap="none">
-                            <a:latin typeface="Cambria Math" panose="02040503050406030204" pitchFamily="18" charset="0"/>
-                          </a:rPr>
-                          <m:t>−</m:t>
-                        </m:r>
-                        <m:r>
-                          <a:rPr lang="en-US" i="1" cap="none">
-                            <a:latin typeface="Cambria Math" panose="02040503050406030204" pitchFamily="18" charset="0"/>
-                          </a:rPr>
-                          <m:t>998.76</m:t>
-                        </m:r>
-                        <m:r>
-                          <a:rPr lang="en-US" i="1" cap="none">
-                            <a:latin typeface="Cambria Math" panose="02040503050406030204" pitchFamily="18" charset="0"/>
-                          </a:rPr>
-                          <m:t>|</m:t>
-                        </m:r>
-                      </m:num>
-                      <m:den>
-                        <m:r>
-                          <a:rPr lang="en-US" i="1" cap="none">
-                            <a:latin typeface="Cambria Math" panose="02040503050406030204" pitchFamily="18" charset="0"/>
-                          </a:rPr>
-                          <m:t>12.33</m:t>
-                        </m:r>
-                      </m:den>
-                    </m:f>
-                    <m:r>
-                      <a:rPr lang="en-US" i="1" cap="none">
-                        <a:latin typeface="Cambria Math" panose="02040503050406030204" pitchFamily="18" charset="0"/>
-                      </a:rPr>
-                      <m:t>=0.101</m:t>
-                    </m:r>
-                  </m:oMath>
-                </a14:m>
-                <a:endParaRPr lang="en-US" b="0" cap="none" dirty="0"/>
-              </a:p>
-              <a:p>
-                <a:pPr marL="0" indent="0">
-                  <a:buNone/>
-                </a:pPr>
-                <a:r>
-                  <a:rPr lang="en-US" cap="none" dirty="0"/>
-                  <a:t>B. </a:t>
-                </a:r>
-                <a14:m>
-                  <m:oMath xmlns:m="http://schemas.openxmlformats.org/officeDocument/2006/math">
-                    <m:r>
-                      <a:rPr lang="en-US" i="1" cap="none">
-                        <a:latin typeface="Cambria Math" panose="02040503050406030204" pitchFamily="18" charset="0"/>
-                      </a:rPr>
-                      <m:t>𝑡</m:t>
-                    </m:r>
-                  </m:oMath>
-                </a14:m>
-                <a:r>
-                  <a:rPr lang="en-US" cap="none" dirty="0"/>
-                  <a:t> value for the Python built in FFT is </a:t>
-                </a:r>
-              </a:p>
-              <a:p>
-                <a:pPr marL="0" indent="0">
-                  <a:buNone/>
-                </a:pPr>
-                <a14:m>
-                  <m:oMathPara xmlns:m="http://schemas.openxmlformats.org/officeDocument/2006/math">
-                    <m:oMathParaPr>
-                      <m:jc m:val="centerGroup"/>
-                    </m:oMathParaPr>
-                    <m:oMath xmlns:m="http://schemas.openxmlformats.org/officeDocument/2006/math">
-                      <m:r>
-                        <a:rPr lang="en-US" i="1" cap="none">
-                          <a:latin typeface="Cambria Math" panose="02040503050406030204" pitchFamily="18" charset="0"/>
-                        </a:rPr>
-                        <m:t>𝑡</m:t>
-                      </m:r>
-                      <m:r>
-                        <a:rPr lang="en-US" i="1" cap="none">
-                          <a:latin typeface="Cambria Math" panose="02040503050406030204" pitchFamily="18" charset="0"/>
-                        </a:rPr>
-                        <m:t>=</m:t>
-                      </m:r>
-                      <m:f>
-                        <m:fPr>
-                          <m:ctrlPr>
-                            <a:rPr lang="en-US" i="1" cap="none">
-                              <a:latin typeface="Cambria Math" panose="02040503050406030204" pitchFamily="18" charset="0"/>
-                            </a:rPr>
-                          </m:ctrlPr>
-                        </m:fPr>
-                        <m:num>
-                          <m:r>
-                            <a:rPr lang="en-US" i="1" cap="none">
-                              <a:latin typeface="Cambria Math" panose="02040503050406030204" pitchFamily="18" charset="0"/>
-                            </a:rPr>
-                            <m:t>|1000−</m:t>
-                          </m:r>
-                          <m:r>
-                            <a:rPr lang="en-US" b="0" i="1" cap="none" smtClean="0">
-                              <a:latin typeface="Cambria Math" panose="02040503050406030204" pitchFamily="18" charset="0"/>
-                            </a:rPr>
-                            <m:t>1000</m:t>
-                          </m:r>
-                          <m:r>
-                            <a:rPr lang="en-US" i="1" cap="none">
-                              <a:latin typeface="Cambria Math" panose="02040503050406030204" pitchFamily="18" charset="0"/>
-                            </a:rPr>
-                            <m:t>|</m:t>
-                          </m:r>
-                        </m:num>
-                        <m:den>
-                          <m:r>
-                            <a:rPr lang="en-US" b="0" i="1" cap="none" smtClean="0">
-                              <a:latin typeface="Cambria Math" panose="02040503050406030204" pitchFamily="18" charset="0"/>
-                            </a:rPr>
-                            <m:t>200</m:t>
-                          </m:r>
-                        </m:den>
-                      </m:f>
-                      <m:r>
-                        <a:rPr lang="en-US" i="1" cap="none">
-                          <a:latin typeface="Cambria Math" panose="02040503050406030204" pitchFamily="18" charset="0"/>
-                        </a:rPr>
-                        <m:t>=</m:t>
-                      </m:r>
-                      <m:r>
-                        <a:rPr lang="en-US" b="0" i="1" cap="none" smtClean="0">
-                          <a:latin typeface="Cambria Math" panose="02040503050406030204" pitchFamily="18" charset="0"/>
-                        </a:rPr>
-                        <m:t>0</m:t>
-                      </m:r>
-                    </m:oMath>
-                  </m:oMathPara>
-                </a14:m>
-                <a:endParaRPr lang="en-US" b="0" cap="none" dirty="0"/>
-              </a:p>
-              <a:p>
-                <a:pPr marL="457200" lvl="1" indent="0">
-                  <a:buNone/>
-                </a:pPr>
-                <a:endParaRPr lang="en-US" b="0" cap="none" dirty="0"/>
-              </a:p>
-              <a:p>
-                <a:pPr marL="0" indent="0">
-                  <a:buNone/>
-                </a:pPr>
-                <a:r>
-                  <a:rPr lang="en-US" b="0" cap="none" dirty="0"/>
-                  <a:t>2.   For the </a:t>
-                </a:r>
-              </a:p>
-              <a:p>
-                <a:pPr marL="0" indent="0">
-                  <a:buNone/>
-                </a:pPr>
-                <a:endParaRPr lang="en-US" b="0" cap="none" dirty="0"/>
-              </a:p>
-              <a:p>
-                <a:pPr marL="457200" indent="-457200">
-                  <a:buFont typeface="+mj-lt"/>
-                  <a:buAutoNum type="arabicPeriod"/>
-                </a:pPr>
-                <a:endParaRPr lang="en-US" cap="none" dirty="0"/>
-              </a:p>
-            </p:txBody>
-          </p:sp>
-        </mc:Choice>
-        <mc:Fallback>
-          <p:sp>
-            <p:nvSpPr>
-              <p:cNvPr id="7" name="Content Placeholder 6">
-                <a:extLst>
-                  <a:ext uri="{FF2B5EF4-FFF2-40B4-BE49-F238E27FC236}">
-                    <a16:creationId xmlns:a16="http://schemas.microsoft.com/office/drawing/2014/main" id="{2A738C74-3616-8B95-B98F-9F23CA6CFE36}"/>
-                  </a:ext>
-                </a:extLst>
-              </p:cNvPr>
-              <p:cNvSpPr>
-                <a:spLocks noGrp="1" noRot="1" noChangeAspect="1" noMove="1" noResize="1" noEditPoints="1" noAdjustHandles="1" noChangeArrowheads="1" noChangeShapeType="1" noTextEdit="1"/>
-              </p:cNvSpPr>
-              <p:nvPr>
-                <p:ph sz="quarter" idx="13"/>
-              </p:nvPr>
-            </p:nvSpPr>
-            <p:spPr>
-              <a:blipFill>
-                <a:blip r:embed="rId3"/>
-                <a:stretch>
-                  <a:fillRect l="-816"/>
-                </a:stretch>
-              </a:blipFill>
-            </p:spPr>
-            <p:txBody>
-              <a:bodyPr/>
-              <a:lstStyle/>
-              <a:p>
-                <a:r>
-                  <a:rPr lang="en-US">
-                    <a:noFill/>
-                  </a:rPr>
-                  <a:t> </a:t>
-                </a:r>
-              </a:p>
-            </p:txBody>
-          </p:sp>
-        </mc:Fallback>
-      </mc:AlternateContent>
+      <p:sp>
+        <p:nvSpPr>
+          <p:cNvPr id="4" name="Text Placeholder 3">
+            <a:extLst>
+              <a:ext uri="{FF2B5EF4-FFF2-40B4-BE49-F238E27FC236}">
+                <a16:creationId xmlns:a16="http://schemas.microsoft.com/office/drawing/2014/main" id="{A90712EA-21C2-2BCA-A6D9-469AD535DD46}"/>
+              </a:ext>
+            </a:extLst>
+          </p:cNvPr>
+          <p:cNvSpPr>
+            <a:spLocks noGrp="1"/>
+          </p:cNvSpPr>
+          <p:nvPr>
+            <p:ph type="body" sz="half" idx="2"/>
+          </p:nvPr>
+        </p:nvSpPr>
+        <p:spPr/>
+        <p:txBody>
+          <a:bodyPr>
+            <a:normAutofit/>
+          </a:bodyPr>
+          <a:lstStyle/>
+          <a:p>
+            <a:pPr algn="l"/>
+            <a:endParaRPr lang="en-US" cap="none" dirty="0"/>
+          </a:p>
+        </p:txBody>
+      </p:sp>
+      <p:sp>
+        <p:nvSpPr>
+          <p:cNvPr id="7" name="Content Placeholder 6">
+            <a:extLst>
+              <a:ext uri="{FF2B5EF4-FFF2-40B4-BE49-F238E27FC236}">
+                <a16:creationId xmlns:a16="http://schemas.microsoft.com/office/drawing/2014/main" id="{2A738C74-3616-8B95-B98F-9F23CA6CFE36}"/>
+              </a:ext>
+            </a:extLst>
+          </p:cNvPr>
+          <p:cNvSpPr>
+            <a:spLocks noGrp="1"/>
+          </p:cNvSpPr>
+          <p:nvPr>
+            <p:ph sz="quarter" idx="13"/>
+          </p:nvPr>
+        </p:nvSpPr>
+        <p:spPr/>
+        <p:txBody>
+          <a:bodyPr/>
+          <a:lstStyle/>
+          <a:p>
+            <a:pPr marL="0" indent="0">
+              <a:buNone/>
+            </a:pPr>
+            <a:endParaRPr lang="en-US" b="0" cap="none" dirty="0"/>
+          </a:p>
+          <a:p>
+            <a:pPr marL="457200" indent="-457200">
+              <a:buFont typeface="+mj-lt"/>
+              <a:buAutoNum type="arabicPeriod"/>
+            </a:pPr>
+            <a:endParaRPr lang="en-US" cap="none" dirty="0"/>
+          </a:p>
+        </p:txBody>
+      </p:sp>
     </p:spTree>
     <p:extLst>
       <p:ext uri="{BB962C8B-B14F-4D97-AF65-F5344CB8AC3E}">
